--- a/out/SID$27.pptx
+++ b/out/SID$27.pptx
@@ -271,7 +271,7 @@
           <a:p>
             <a:fld id="{3E7B0988-7BE3-4A4D-83CA-DA7426D08CD6}" type="datetimeFigureOut">
               <a:rPr kumimoji="1" lang="ja-JP" altLang="en-US" smtClean="0"/>
-              <a:t>2025/10/27</a:t>
+              <a:t>2025/11/4</a:t>
             </a:fld>
             <a:endParaRPr kumimoji="1" lang="ja-JP" altLang="en-US"/>
           </a:p>
@@ -501,7 +501,7 @@
           <a:p>
             <a:fld id="{3E7B0988-7BE3-4A4D-83CA-DA7426D08CD6}" type="datetimeFigureOut">
               <a:rPr kumimoji="1" lang="ja-JP" altLang="en-US" smtClean="0"/>
-              <a:t>2025/10/27</a:t>
+              <a:t>2025/11/4</a:t>
             </a:fld>
             <a:endParaRPr kumimoji="1" lang="ja-JP" altLang="en-US"/>
           </a:p>
@@ -741,7 +741,7 @@
           <a:p>
             <a:fld id="{3E7B0988-7BE3-4A4D-83CA-DA7426D08CD6}" type="datetimeFigureOut">
               <a:rPr kumimoji="1" lang="ja-JP" altLang="en-US" smtClean="0"/>
-              <a:t>2025/10/27</a:t>
+              <a:t>2025/11/4</a:t>
             </a:fld>
             <a:endParaRPr kumimoji="1" lang="ja-JP" altLang="en-US"/>
           </a:p>
@@ -971,7 +971,7 @@
           <a:p>
             <a:fld id="{3E7B0988-7BE3-4A4D-83CA-DA7426D08CD6}" type="datetimeFigureOut">
               <a:rPr kumimoji="1" lang="ja-JP" altLang="en-US" smtClean="0"/>
-              <a:t>2025/10/27</a:t>
+              <a:t>2025/11/4</a:t>
             </a:fld>
             <a:endParaRPr kumimoji="1" lang="ja-JP" altLang="en-US"/>
           </a:p>
@@ -1246,7 +1246,7 @@
           <a:p>
             <a:fld id="{3E7B0988-7BE3-4A4D-83CA-DA7426D08CD6}" type="datetimeFigureOut">
               <a:rPr kumimoji="1" lang="ja-JP" altLang="en-US" smtClean="0"/>
-              <a:t>2025/10/27</a:t>
+              <a:t>2025/11/4</a:t>
             </a:fld>
             <a:endParaRPr kumimoji="1" lang="ja-JP" altLang="en-US"/>
           </a:p>
@@ -1575,7 +1575,7 @@
           <a:p>
             <a:fld id="{3E7B0988-7BE3-4A4D-83CA-DA7426D08CD6}" type="datetimeFigureOut">
               <a:rPr kumimoji="1" lang="ja-JP" altLang="en-US" smtClean="0"/>
-              <a:t>2025/10/27</a:t>
+              <a:t>2025/11/4</a:t>
             </a:fld>
             <a:endParaRPr kumimoji="1" lang="ja-JP" altLang="en-US"/>
           </a:p>
@@ -2051,7 +2051,7 @@
           <a:p>
             <a:fld id="{3E7B0988-7BE3-4A4D-83CA-DA7426D08CD6}" type="datetimeFigureOut">
               <a:rPr kumimoji="1" lang="ja-JP" altLang="en-US" smtClean="0"/>
-              <a:t>2025/10/27</a:t>
+              <a:t>2025/11/4</a:t>
             </a:fld>
             <a:endParaRPr kumimoji="1" lang="ja-JP" altLang="en-US"/>
           </a:p>
@@ -2192,7 +2192,7 @@
           <a:p>
             <a:fld id="{3E7B0988-7BE3-4A4D-83CA-DA7426D08CD6}" type="datetimeFigureOut">
               <a:rPr kumimoji="1" lang="ja-JP" altLang="en-US" smtClean="0"/>
-              <a:t>2025/10/27</a:t>
+              <a:t>2025/11/4</a:t>
             </a:fld>
             <a:endParaRPr kumimoji="1" lang="ja-JP" altLang="en-US"/>
           </a:p>
@@ -2305,7 +2305,7 @@
           <a:p>
             <a:fld id="{3E7B0988-7BE3-4A4D-83CA-DA7426D08CD6}" type="datetimeFigureOut">
               <a:rPr kumimoji="1" lang="ja-JP" altLang="en-US" smtClean="0"/>
-              <a:t>2025/10/27</a:t>
+              <a:t>2025/11/4</a:t>
             </a:fld>
             <a:endParaRPr kumimoji="1" lang="ja-JP" altLang="en-US"/>
           </a:p>
@@ -2648,7 +2648,7 @@
           <a:p>
             <a:fld id="{3E7B0988-7BE3-4A4D-83CA-DA7426D08CD6}" type="datetimeFigureOut">
               <a:rPr kumimoji="1" lang="ja-JP" altLang="en-US" smtClean="0"/>
-              <a:t>2025/10/27</a:t>
+              <a:t>2025/11/4</a:t>
             </a:fld>
             <a:endParaRPr kumimoji="1" lang="ja-JP" altLang="en-US"/>
           </a:p>
@@ -2936,7 +2936,7 @@
           <a:p>
             <a:fld id="{3E7B0988-7BE3-4A4D-83CA-DA7426D08CD6}" type="datetimeFigureOut">
               <a:rPr kumimoji="1" lang="ja-JP" altLang="en-US" smtClean="0"/>
-              <a:t>2025/10/27</a:t>
+              <a:t>2025/11/4</a:t>
             </a:fld>
             <a:endParaRPr kumimoji="1" lang="ja-JP" altLang="en-US"/>
           </a:p>
@@ -3209,7 +3209,7 @@
           <a:p>
             <a:fld id="{3E7B0988-7BE3-4A4D-83CA-DA7426D08CD6}" type="datetimeFigureOut">
               <a:rPr kumimoji="1" lang="ja-JP" altLang="en-US" smtClean="0"/>
-              <a:t>2025/10/27</a:t>
+              <a:t>2025/11/4</a:t>
             </a:fld>
             <a:endParaRPr kumimoji="1" lang="ja-JP" altLang="en-US"/>
           </a:p>
@@ -7160,10 +7160,6 @@
               </a:rPr>
               <a:t>AES128</a:t>
             </a:r>
-            <a:r>
-              <a:rPr lang="ja-JP" altLang="en-US" sz="2000" dirty="0"/>
-              <a:t>。</a:t>
-            </a:r>
             <a:endParaRPr lang="en-US" altLang="ja-JP" sz="2000" dirty="0"/>
           </a:p>
           <a:p>
@@ -7240,7 +7236,7 @@
                 <a:effectLst/>
                 <a:latin typeface="Roboto" panose="02000000000000000000" pitchFamily="2" charset="0"/>
               </a:rPr>
-              <a:t>とする。</a:t>
+              <a:t>とする</a:t>
             </a:r>
             <a:endParaRPr lang="en-US" altLang="ja-JP" sz="2000" b="0" i="0" dirty="0">
               <a:solidFill>
@@ -7380,7 +7376,7 @@
                 </a:solidFill>
                 <a:latin typeface="Roboto" panose="02000000000000000000" pitchFamily="2" charset="0"/>
               </a:rPr>
-              <a:t>に変更。</a:t>
+              <a:t>に変更</a:t>
             </a:r>
             <a:endParaRPr lang="en-US" altLang="ja-JP" sz="2000" dirty="0">
               <a:solidFill>
